--- a/assets/powerpoints/module-activite/C3-chaque-plusieurs-quelques.pptx
+++ b/assets/powerpoints/module-activite/C3-chaque-plusieurs-quelques.pptx
@@ -6079,7 +6079,43 @@
                 </a:solidFill>
                 <a:latin typeface="Verdana"/>
               </a:rPr>
-              <a:t>Dans un texte, &lt;b&gt;chaque&lt;/b&gt; et &lt;b&gt;plusieurs&lt;/b&gt; passent partout. Gardez « bien des » pour l'oral.</a:t>
+              <a:t>Dans un texte, </a:t>
+            </a:r>
+            <a:r>
+              <a:rPr sz="1600" b="1" i="0">
+                <a:solidFill>
+                  <a:srgbClr val="3A3D40"/>
+                </a:solidFill>
+                <a:latin typeface="Verdana"/>
+              </a:rPr>
+              <a:t>chaque</a:t>
+            </a:r>
+            <a:r>
+              <a:rPr sz="1600" b="0" i="0">
+                <a:solidFill>
+                  <a:srgbClr val="3A3D40"/>
+                </a:solidFill>
+                <a:latin typeface="Verdana"/>
+              </a:rPr>
+              <a:t> et </a:t>
+            </a:r>
+            <a:r>
+              <a:rPr sz="1600" b="1" i="0">
+                <a:solidFill>
+                  <a:srgbClr val="3A3D40"/>
+                </a:solidFill>
+                <a:latin typeface="Verdana"/>
+              </a:rPr>
+              <a:t>plusieurs</a:t>
+            </a:r>
+            <a:r>
+              <a:rPr sz="1600" b="0" i="0">
+                <a:solidFill>
+                  <a:srgbClr val="3A3D40"/>
+                </a:solidFill>
+                <a:latin typeface="Verdana"/>
+              </a:rPr>
+              <a:t> passent partout. Gardez « bien des » pour l'oral.</a:t>
             </a:r>
           </a:p>
         </p:txBody>
@@ -8829,13 +8865,22 @@
               </a:lnSpc>
             </a:pPr>
             <a:r>
+              <a:rPr sz="2000" b="1" i="0">
+                <a:solidFill>
+                  <a:srgbClr val="4B4F52"/>
+                </a:solidFill>
+                <a:latin typeface="Verdana"/>
+              </a:rPr>
+              <a:t>chaque</a:t>
+            </a:r>
+            <a:r>
               <a:rPr sz="2000" b="0" i="0">
                 <a:solidFill>
                   <a:srgbClr val="4B4F52"/>
                 </a:solidFill>
                 <a:latin typeface="Verdana"/>
               </a:rPr>
-              <a:t>&lt;b&gt;chaque&lt;/b&gt; ne prend jamais de s, et le nom qui suit reste au singulier — même si on parle de douze cours. C'est le contraire de ce que l'intuition suggère : on les prend un à la fois.</a:t>
+              <a:t> ne prend jamais de s, et le nom qui suit reste au singulier — même si on parle de douze cours. C'est le contraire de ce que l'intuition suggère : on les prend un à la fois.</a:t>
             </a:r>
           </a:p>
         </p:txBody>
@@ -9725,13 +9770,40 @@
               </a:lnSpc>
             </a:pPr>
             <a:r>
+              <a:rPr sz="2000" b="1" i="0">
+                <a:solidFill>
+                  <a:srgbClr val="4B4F52"/>
+                </a:solidFill>
+                <a:latin typeface="Verdana"/>
+              </a:rPr>
+              <a:t>quelques</a:t>
+            </a:r>
+            <a:r>
               <a:rPr sz="2000" b="0" i="0">
                 <a:solidFill>
                   <a:srgbClr val="4B4F52"/>
                 </a:solidFill>
                 <a:latin typeface="Verdana"/>
               </a:rPr>
-              <a:t>&lt;b&gt;quelques&lt;/b&gt; (avec s) annonce un petit nombre et se met devant un nom pluriel. &lt;b&gt;quelque chose&lt;/b&gt; est un mot différent, qui désigne une chose indéterminée et reste toujours au singulier. Les deux n'ont rien à voir.</a:t>
+              <a:t> (avec s) annonce un petit nombre et se met devant un nom pluriel. </a:t>
+            </a:r>
+            <a:r>
+              <a:rPr sz="2000" b="1" i="0">
+                <a:solidFill>
+                  <a:srgbClr val="4B4F52"/>
+                </a:solidFill>
+                <a:latin typeface="Verdana"/>
+              </a:rPr>
+              <a:t>quelque chose</a:t>
+            </a:r>
+            <a:r>
+              <a:rPr sz="2000" b="0" i="0">
+                <a:solidFill>
+                  <a:srgbClr val="4B4F52"/>
+                </a:solidFill>
+                <a:latin typeface="Verdana"/>
+              </a:rPr>
+              <a:t> est un mot différent, qui désigne une chose indéterminée et reste toujours au singulier. Les deux n'ont rien à voir.</a:t>
             </a:r>
           </a:p>
         </p:txBody>
